--- a/docs/webinar/E2E-1/E2E-1-diapositivas.pptx
+++ b/docs/webinar/E2E-1/E2E-1-diapositivas.pptx
@@ -148,12 +148,12 @@
   <p:extLst>
     <p:ext uri="{521415D9-36F7-43E2-AB2F-B90AF26B5E84}">
       <p14:sectionLst xmlns:p14="http://schemas.microsoft.com/office/powerpoint/2010/main">
-        <p14:section name="Portada" id="{d43bdf4a-04da-08bf-8ebd-9fde6a2e96a0}">
+        <p14:section name="Portada" id="{746036b3-2888-47df-e1c6-d9d46a55c816}">
           <p14:sldIdLst>
             <p14:sldId id="256"/>
           </p14:sldIdLst>
         </p14:section>
-        <p14:section name="Clase 1 · Del taller al plan de respuesta" id="{af62a993-0190-260c-1a75-a4e8d7c47cb6}">
+        <p14:section name="Clase 1 · Del taller al plan de respuesta" id="{6f84a510-9c9c-17da-35e3-e47acd5e04cb}">
           <p14:sldIdLst>
             <p14:sldId id="257"/>
             <p14:sldId id="258"/>
@@ -176,7 +176,7 @@
             <p14:sldId id="275"/>
           </p14:sldIdLst>
         </p14:section>
-        <p14:section name="Clase 2 · El control continuo" id="{cf73a007-e991-dfb2-c1cd-87439d9350ea}">
+        <p14:section name="Clase 2 · El control continuo" id="{685f1770-b4a9-09fe-8559-a0f24dcd83b1}">
           <p14:sldIdLst>
             <p14:sldId id="276"/>
             <p14:sldId id="277"/>
@@ -200,7 +200,7 @@
             <p14:sldId id="295"/>
           </p14:sldIdLst>
         </p14:section>
-        <p14:section name="Glosario" id="{d5bf904c-7eaa-ecc3-62a2-d16dc611c974}">
+        <p14:section name="Glosario" id="{43bfe0a0-18b6-8d80-6914-04418152deee}">
           <p14:sldIdLst>
             <p14:sldId id="296"/>
             <p14:sldId id="297"/>
@@ -1490,7 +1490,7 @@
           <a:p>
             <a:r>
               <a:rPr lang="en-US" dirty="0"/>
-              <a:t>La hoja está en docs/webinar/E2E-1/ejercicio.md. Pedir órdenes de magnitud, no precisión. Mostrar la solución de referencia al terminar.</a:t>
+              <a:t>La hoja está en docs/webinar/E2E-1/ejercicio.md y explica la mecánica al comienzo. Pedir órdenes de magnitud, no precisión. El ejemplo resuelto está plegado al final de la hoja: mostrarlo al terminar, no antes.</a:t>
             </a:r>
             <a:endParaRPr lang="en-US" dirty="0"/>
           </a:p>
@@ -3426,7 +3426,7 @@
           <a:p>
             <a:r>
               <a:rPr lang="en-US" dirty="0"/>
-              <a:t>Si el asistente no tiene reserva de riesgo formal, que anote cuánto se gastó en respuestas a riesgos y de qué partida salió. Mostrar la solución de referencia al terminar.</a:t>
+              <a:t>Si el asistente no tiene reserva de riesgo formal, que anote cuánto se gastó en respuestas a riesgos y de qué partida salió. Mostrar el ejemplo resuelto de la hoja al terminar.</a:t>
             </a:r>
             <a:endParaRPr lang="en-US" dirty="0"/>
           </a:p>

--- a/docs/webinar/E2E-1/E2E-1-diapositivas.pptx
+++ b/docs/webinar/E2E-1/E2E-1-diapositivas.pptx
@@ -151,12 +151,12 @@
   <p:extLst>
     <p:ext uri="{521415D9-36F7-43E2-AB2F-B90AF26B5E84}">
       <p14:sectionLst xmlns:p14="http://schemas.microsoft.com/office/powerpoint/2010/main">
-        <p14:section name="Portada" id="{0a8356e6-e502-b083-698a-7d60df7a9848}">
+        <p14:section name="Portada" id="{d2aea23a-94de-9f9a-6d4e-2165a3dd91a7}">
           <p14:sldIdLst>
             <p14:sldId id="256"/>
           </p14:sldIdLst>
         </p14:section>
-        <p14:section name="Clase 1 · Del taller al plan de respuesta" id="{4880a366-ac31-4fa5-b1e3-582826005802}">
+        <p14:section name="Clase 1 · Del taller al plan de respuesta" id="{f788678c-a54e-158e-aebd-b1c991c68351}">
           <p14:sldIdLst>
             <p14:sldId id="257"/>
             <p14:sldId id="258"/>
@@ -180,7 +180,7 @@
             <p14:sldId id="276"/>
           </p14:sldIdLst>
         </p14:section>
-        <p14:section name="Clase 2 · El control continuo" id="{76cf2491-579a-d009-e9bb-b8b3fe3871d1}">
+        <p14:section name="Clase 2 · El control continuo" id="{62d8591b-8d46-a850-c662-5b0bf654d541}">
           <p14:sldIdLst>
             <p14:sldId id="277"/>
             <p14:sldId id="278"/>
@@ -205,7 +205,7 @@
             <p14:sldId id="297"/>
           </p14:sldIdLst>
         </p14:section>
-        <p14:section name="Glosario" id="{09b63838-fa22-610a-22a8-9370e4ecd8a6}">
+        <p14:section name="Glosario" id="{81dec5bd-03d2-b36c-399b-dbf5c8c7d752}">
           <p14:sldIdLst>
             <p14:sldId id="298"/>
             <p14:sldId id="299"/>
@@ -4719,7 +4719,7 @@
                   <a:srgbClr val="D6E4F0"/>
                 </a:solidFill>
               </a:rPr>
-              <a:t>pm-method 2.4.0 · Webinar E2E-1 · Clase 1</a:t>
+              <a:t>pm-method 2.5.0 · Webinar E2E-1 · Clase 1</a:t>
             </a:r>
             <a:endParaRPr lang="en-US" sz="1000" dirty="0"/>
           </a:p>
@@ -4959,7 +4959,7 @@
                   <a:srgbClr val="696969"/>
                 </a:solidFill>
               </a:rPr>
-              <a:t>pm-method 2.4.0 · Webinar E2E-1 · Clase 2</a:t>
+              <a:t>pm-method 2.5.0 · Webinar E2E-1 · Clase 2</a:t>
             </a:r>
             <a:endParaRPr lang="en-US" sz="1000" dirty="0"/>
           </a:p>
@@ -5177,7 +5177,7 @@
                   <a:srgbClr val="D6E4F0"/>
                 </a:solidFill>
               </a:rPr>
-              <a:t>pm-method 2.4.0 · Webinar E2E-1 · Clase 2</a:t>
+              <a:t>pm-method 2.5.0 · Webinar E2E-1 · Clase 2</a:t>
             </a:r>
             <a:endParaRPr lang="en-US" sz="1000" dirty="0"/>
           </a:p>
@@ -5395,7 +5395,7 @@
                   <a:srgbClr val="D6E4F0"/>
                 </a:solidFill>
               </a:rPr>
-              <a:t>pm-method 2.4.0 · Webinar E2E-1 · Clase 2</a:t>
+              <a:t>pm-method 2.5.0 · Webinar E2E-1 · Clase 2</a:t>
             </a:r>
             <a:endParaRPr lang="en-US" sz="1000" dirty="0"/>
           </a:p>
@@ -5613,7 +5613,7 @@
                   <a:srgbClr val="D6E4F0"/>
                 </a:solidFill>
               </a:rPr>
-              <a:t>pm-method 2.4.0 · Webinar E2E-1 · Clase 2</a:t>
+              <a:t>pm-method 2.5.0 · Webinar E2E-1 · Clase 2</a:t>
             </a:r>
             <a:endParaRPr lang="en-US" sz="1000" dirty="0"/>
           </a:p>
@@ -5789,7 +5789,7 @@
                   <a:srgbClr val="D6E4F0"/>
                 </a:solidFill>
               </a:rPr>
-              <a:t>pm-method 2.4.0 · Webinar E2E-1</a:t>
+              <a:t>pm-method 2.5.0 · Webinar E2E-1</a:t>
             </a:r>
             <a:endParaRPr lang="en-US" sz="1000" dirty="0"/>
           </a:p>
@@ -5984,7 +5984,7 @@
                   <a:srgbClr val="696969"/>
                 </a:solidFill>
               </a:rPr>
-              <a:t>pm-method 2.4.0 · Webinar E2E-1</a:t>
+              <a:t>pm-method 2.5.0 · Webinar E2E-1</a:t>
             </a:r>
             <a:endParaRPr lang="en-US" sz="1000" dirty="0"/>
           </a:p>
@@ -6202,7 +6202,7 @@
                   <a:srgbClr val="D6E4F0"/>
                 </a:solidFill>
               </a:rPr>
-              <a:t>pm-method 2.4.0 · Webinar E2E-1</a:t>
+              <a:t>pm-method 2.5.0 · Webinar E2E-1</a:t>
             </a:r>
             <a:endParaRPr lang="en-US" sz="1000" dirty="0"/>
           </a:p>
@@ -6420,7 +6420,7 @@
                   <a:srgbClr val="D6E4F0"/>
                 </a:solidFill>
               </a:rPr>
-              <a:t>pm-method 2.4.0 · Webinar E2E-1</a:t>
+              <a:t>pm-method 2.5.0 · Webinar E2E-1</a:t>
             </a:r>
             <a:endParaRPr lang="en-US" sz="1000" dirty="0"/>
           </a:p>
@@ -6638,7 +6638,7 @@
                   <a:srgbClr val="D6E4F0"/>
                 </a:solidFill>
               </a:rPr>
-              <a:t>pm-method 2.4.0 · Webinar E2E-1</a:t>
+              <a:t>pm-method 2.5.0 · Webinar E2E-1</a:t>
             </a:r>
             <a:endParaRPr lang="en-US" sz="1000" dirty="0"/>
           </a:p>
@@ -6878,7 +6878,7 @@
                   <a:srgbClr val="696969"/>
                 </a:solidFill>
               </a:rPr>
-              <a:t>pm-method 2.4.0 · Webinar E2E-1 · Clase 1</a:t>
+              <a:t>pm-method 2.5.0 · Webinar E2E-1 · Clase 1</a:t>
             </a:r>
             <a:endParaRPr lang="en-US" sz="1000" dirty="0"/>
           </a:p>
@@ -7096,7 +7096,7 @@
                   <a:srgbClr val="D6E4F0"/>
                 </a:solidFill>
               </a:rPr>
-              <a:t>pm-method 2.4.0 · Webinar E2E-1 · Clase 1</a:t>
+              <a:t>pm-method 2.5.0 · Webinar E2E-1 · Clase 1</a:t>
             </a:r>
             <a:endParaRPr lang="en-US" sz="1000" dirty="0"/>
           </a:p>
@@ -7314,7 +7314,7 @@
                   <a:srgbClr val="D6E4F0"/>
                 </a:solidFill>
               </a:rPr>
-              <a:t>pm-method 2.4.0 · Webinar E2E-1 · Clase 1</a:t>
+              <a:t>pm-method 2.5.0 · Webinar E2E-1 · Clase 1</a:t>
             </a:r>
             <a:endParaRPr lang="en-US" sz="1000" dirty="0"/>
           </a:p>
@@ -7758,7 +7758,7 @@
                 <a:ea typeface="Arial" pitchFamily="34" charset="-122"/>
                 <a:cs typeface="Arial" pitchFamily="34" charset="-120"/>
               </a:rPr>
-              <a:t>Webinar · pm-method 2.4.0 · E2E-1</a:t>
+              <a:t>Webinar · pm-method 2.5.0 · E2E-1</a:t>
             </a:r>
             <a:endParaRPr lang="en-US" sz="1600" dirty="0"/>
           </a:p>

--- a/docs/webinar/E2E-1/E2E-1-diapositivas.pptx
+++ b/docs/webinar/E2E-1/E2E-1-diapositivas.pptx
@@ -152,12 +152,12 @@
   <p:extLst>
     <p:ext uri="{521415D9-36F7-43E2-AB2F-B90AF26B5E84}">
       <p14:sectionLst xmlns:p14="http://schemas.microsoft.com/office/powerpoint/2010/main">
-        <p14:section name="Portada" id="{7796ab51-2e99-f3ec-9763-1cdfbd5b4f74}">
+        <p14:section name="Portada" id="{11cad022-8c2f-01d3-2d19-609dcccbccaa}">
           <p14:sldIdLst>
             <p14:sldId id="256"/>
           </p14:sldIdLst>
         </p14:section>
-        <p14:section name="Clase 1 · Del taller al plan de respuesta" id="{fbdfc4dc-45d6-a5ef-100a-dc7e22b0a71b}">
+        <p14:section name="Clase 1 · Del taller al plan de respuesta" id="{0494d901-c553-f06a-6399-bd31e6310e60}">
           <p14:sldIdLst>
             <p14:sldId id="257"/>
             <p14:sldId id="258"/>
@@ -182,7 +182,7 @@
             <p14:sldId id="277"/>
           </p14:sldIdLst>
         </p14:section>
-        <p14:section name="Clase 2 · El control continuo" id="{89b37457-312f-7d95-3313-53e881f6b0a7}">
+        <p14:section name="Clase 2 · El control continuo" id="{991710aa-6c98-88dd-6bca-de132919e274}">
           <p14:sldIdLst>
             <p14:sldId id="278"/>
             <p14:sldId id="279"/>
@@ -207,7 +207,7 @@
             <p14:sldId id="298"/>
           </p14:sldIdLst>
         </p14:section>
-        <p14:section name="Glosario" id="{cbd5073d-e131-364d-d3b8-b1a9d5c7890e}">
+        <p14:section name="Glosario" id="{6f6f11e4-1bb6-eb70-0c5c-5884193aa40d}">
           <p14:sldIdLst>
             <p14:sldId id="299"/>
             <p14:sldId id="300"/>
@@ -4809,7 +4809,7 @@
                   <a:srgbClr val="D6E4F0"/>
                 </a:solidFill>
               </a:rPr>
-              <a:t>pm-method 2.6.0 · Webinar E2E-1 · Clase 1</a:t>
+              <a:t>pm-method 2.7.0 · Webinar E2E-1 · Clase 1</a:t>
             </a:r>
             <a:endParaRPr lang="en-US" sz="1000" dirty="0"/>
           </a:p>
@@ -5049,7 +5049,7 @@
                   <a:srgbClr val="696969"/>
                 </a:solidFill>
               </a:rPr>
-              <a:t>pm-method 2.6.0 · Webinar E2E-1 · Clase 2</a:t>
+              <a:t>pm-method 2.7.0 · Webinar E2E-1 · Clase 2</a:t>
             </a:r>
             <a:endParaRPr lang="en-US" sz="1000" dirty="0"/>
           </a:p>
@@ -5267,7 +5267,7 @@
                   <a:srgbClr val="D6E4F0"/>
                 </a:solidFill>
               </a:rPr>
-              <a:t>pm-method 2.6.0 · Webinar E2E-1 · Clase 2</a:t>
+              <a:t>pm-method 2.7.0 · Webinar E2E-1 · Clase 2</a:t>
             </a:r>
             <a:endParaRPr lang="en-US" sz="1000" dirty="0"/>
           </a:p>
@@ -5485,7 +5485,7 @@
                   <a:srgbClr val="D6E4F0"/>
                 </a:solidFill>
               </a:rPr>
-              <a:t>pm-method 2.6.0 · Webinar E2E-1 · Clase 2</a:t>
+              <a:t>pm-method 2.7.0 · Webinar E2E-1 · Clase 2</a:t>
             </a:r>
             <a:endParaRPr lang="en-US" sz="1000" dirty="0"/>
           </a:p>
@@ -5703,7 +5703,7 @@
                   <a:srgbClr val="D6E4F0"/>
                 </a:solidFill>
               </a:rPr>
-              <a:t>pm-method 2.6.0 · Webinar E2E-1 · Clase 2</a:t>
+              <a:t>pm-method 2.7.0 · Webinar E2E-1 · Clase 2</a:t>
             </a:r>
             <a:endParaRPr lang="en-US" sz="1000" dirty="0"/>
           </a:p>
@@ -5879,7 +5879,7 @@
                   <a:srgbClr val="D6E4F0"/>
                 </a:solidFill>
               </a:rPr>
-              <a:t>pm-method 2.6.0 · Webinar E2E-1</a:t>
+              <a:t>pm-method 2.7.0 · Webinar E2E-1</a:t>
             </a:r>
             <a:endParaRPr lang="en-US" sz="1000" dirty="0"/>
           </a:p>
@@ -6074,7 +6074,7 @@
                   <a:srgbClr val="696969"/>
                 </a:solidFill>
               </a:rPr>
-              <a:t>pm-method 2.6.0 · Webinar E2E-1</a:t>
+              <a:t>pm-method 2.7.0 · Webinar E2E-1</a:t>
             </a:r>
             <a:endParaRPr lang="en-US" sz="1000" dirty="0"/>
           </a:p>
@@ -6292,7 +6292,7 @@
                   <a:srgbClr val="D6E4F0"/>
                 </a:solidFill>
               </a:rPr>
-              <a:t>pm-method 2.6.0 · Webinar E2E-1</a:t>
+              <a:t>pm-method 2.7.0 · Webinar E2E-1</a:t>
             </a:r>
             <a:endParaRPr lang="en-US" sz="1000" dirty="0"/>
           </a:p>
@@ -6510,7 +6510,7 @@
                   <a:srgbClr val="D6E4F0"/>
                 </a:solidFill>
               </a:rPr>
-              <a:t>pm-method 2.6.0 · Webinar E2E-1</a:t>
+              <a:t>pm-method 2.7.0 · Webinar E2E-1</a:t>
             </a:r>
             <a:endParaRPr lang="en-US" sz="1000" dirty="0"/>
           </a:p>
@@ -6728,7 +6728,7 @@
                   <a:srgbClr val="D6E4F0"/>
                 </a:solidFill>
               </a:rPr>
-              <a:t>pm-method 2.6.0 · Webinar E2E-1</a:t>
+              <a:t>pm-method 2.7.0 · Webinar E2E-1</a:t>
             </a:r>
             <a:endParaRPr lang="en-US" sz="1000" dirty="0"/>
           </a:p>
@@ -6968,7 +6968,7 @@
                   <a:srgbClr val="696969"/>
                 </a:solidFill>
               </a:rPr>
-              <a:t>pm-method 2.6.0 · Webinar E2E-1 · Clase 1</a:t>
+              <a:t>pm-method 2.7.0 · Webinar E2E-1 · Clase 1</a:t>
             </a:r>
             <a:endParaRPr lang="en-US" sz="1000" dirty="0"/>
           </a:p>
@@ -7186,7 +7186,7 @@
                   <a:srgbClr val="D6E4F0"/>
                 </a:solidFill>
               </a:rPr>
-              <a:t>pm-method 2.6.0 · Webinar E2E-1 · Clase 1</a:t>
+              <a:t>pm-method 2.7.0 · Webinar E2E-1 · Clase 1</a:t>
             </a:r>
             <a:endParaRPr lang="en-US" sz="1000" dirty="0"/>
           </a:p>
@@ -7404,7 +7404,7 @@
                   <a:srgbClr val="D6E4F0"/>
                 </a:solidFill>
               </a:rPr>
-              <a:t>pm-method 2.6.0 · Webinar E2E-1 · Clase 1</a:t>
+              <a:t>pm-method 2.7.0 · Webinar E2E-1 · Clase 1</a:t>
             </a:r>
             <a:endParaRPr lang="en-US" sz="1000" dirty="0"/>
           </a:p>
@@ -7848,7 +7848,7 @@
                 <a:ea typeface="Arial" pitchFamily="34" charset="-122"/>
                 <a:cs typeface="Arial" pitchFamily="34" charset="-120"/>
               </a:rPr>
-              <a:t>Webinar · pm-method 2.6.0 · E2E-1</a:t>
+              <a:t>Webinar · pm-method 2.7.0 · E2E-1</a:t>
             </a:r>
             <a:endParaRPr lang="en-US" sz="1600" dirty="0"/>
           </a:p>
